--- a/curriculum/M03/W03/L01/slides.pptx
+++ b/curriculum/M03/W03/L01/slides.pptx
@@ -54,7 +54,6 @@
     <p:sldId id="302" r:id="rId54"/>
     <p:sldId id="303" r:id="rId55"/>
     <p:sldId id="304" r:id="rId56"/>
-    <p:sldId id="305" r:id="rId57"/>
   </p:sldIdLst>
   <p:sldSz cx="12191695" cy="6858000" type="screen4x3"/>
   <p:notesSz cx="6858000" cy="9144000"/>
@@ -6531,11 +6530,40 @@
                 <a:ea typeface="Malgun Gothic"/>
                 <a:cs typeface="Malgun Gothic"/>
               </a:rPr>
-              <a:t>가 polypyrimidine tract와 3' splice site AG에 결합한다(E complex). 2. </a:t>
-            </a:r>
+              <a:t>가 polypyrimidine tract와 3' splice site AG에 결합한다(E complex).</a:t>
+            </a:r>
+          </a:p>
+          <a:p>
+            <a:pPr>
+              <a:spcAft>
+                <a:spcPts val="900"/>
+              </a:spcAft>
+            </a:pPr>
             <a:r>
               <a:rPr sz="1400" b="1" i="0">
                 <a:solidFill>
+                  <a:srgbClr val="F2B705"/>
+                </a:solidFill>
+                <a:latin typeface="Malgun Gothic"/>
+                <a:ea typeface="Malgun Gothic"/>
+                <a:cs typeface="Malgun Gothic"/>
+              </a:rPr>
+              <a:t>•  </a:t>
+            </a:r>
+            <a:r>
+              <a:rPr sz="1400" b="0" i="0">
+                <a:solidFill>
+                  <a:srgbClr val="11202B"/>
+                </a:solidFill>
+                <a:latin typeface="Malgun Gothic"/>
+                <a:ea typeface="Malgun Gothic"/>
+                <a:cs typeface="Malgun Gothic"/>
+              </a:rPr>
+              <a:t>2. </a:t>
+            </a:r>
+            <a:r>
+              <a:rPr sz="1400" b="1" i="0">
+                <a:solidFill>
                   <a:srgbClr val="11202B"/>
                 </a:solidFill>
                 <a:latin typeface="Malgun Gothic"/>
@@ -6575,11 +6603,40 @@
                 <a:ea typeface="Malgun Gothic"/>
                 <a:cs typeface="Malgun Gothic"/>
               </a:rPr>
-              <a:t>되고, 이로써 그 2'-OH가 반응에 쓰일 수 있게 된다(A complex). 3. </a:t>
-            </a:r>
+              <a:t>되고, 이로써 그 2'-OH가 반응에 쓰일 수 있게 된다(A complex).</a:t>
+            </a:r>
+          </a:p>
+          <a:p>
+            <a:pPr>
+              <a:spcAft>
+                <a:spcPts val="900"/>
+              </a:spcAft>
+            </a:pPr>
             <a:r>
               <a:rPr sz="1400" b="1" i="0">
                 <a:solidFill>
+                  <a:srgbClr val="F2B705"/>
+                </a:solidFill>
+                <a:latin typeface="Malgun Gothic"/>
+                <a:ea typeface="Malgun Gothic"/>
+                <a:cs typeface="Malgun Gothic"/>
+              </a:rPr>
+              <a:t>•  </a:t>
+            </a:r>
+            <a:r>
+              <a:rPr sz="1400" b="0" i="0">
+                <a:solidFill>
+                  <a:srgbClr val="11202B"/>
+                </a:solidFill>
+                <a:latin typeface="Malgun Gothic"/>
+                <a:ea typeface="Malgun Gothic"/>
+                <a:cs typeface="Malgun Gothic"/>
+              </a:rPr>
+              <a:t>3. </a:t>
+            </a:r>
+            <a:r>
+              <a:rPr sz="1400" b="1" i="0">
+                <a:solidFill>
                   <a:srgbClr val="11202B"/>
                 </a:solidFill>
                 <a:latin typeface="Malgun Gothic"/>
@@ -6597,11 +6654,40 @@
                 <a:ea typeface="Malgun Gothic"/>
                 <a:cs typeface="Malgun Gothic"/>
               </a:rPr>
-              <a:t>가 들어온다(B complex). 4. 구조 재배열이 일어난다. </a:t>
-            </a:r>
+              <a:t>가 들어온다(B complex).</a:t>
+            </a:r>
+          </a:p>
+          <a:p>
+            <a:pPr>
+              <a:spcAft>
+                <a:spcPts val="900"/>
+              </a:spcAft>
+            </a:pPr>
             <a:r>
               <a:rPr sz="1400" b="1" i="0">
                 <a:solidFill>
+                  <a:srgbClr val="F2B705"/>
+                </a:solidFill>
+                <a:latin typeface="Malgun Gothic"/>
+                <a:ea typeface="Malgun Gothic"/>
+                <a:cs typeface="Malgun Gothic"/>
+              </a:rPr>
+              <a:t>•  </a:t>
+            </a:r>
+            <a:r>
+              <a:rPr sz="1400" b="0" i="0">
+                <a:solidFill>
+                  <a:srgbClr val="11202B"/>
+                </a:solidFill>
+                <a:latin typeface="Malgun Gothic"/>
+                <a:ea typeface="Malgun Gothic"/>
+                <a:cs typeface="Malgun Gothic"/>
+              </a:rPr>
+              <a:t>4. 구조 재배열이 일어난다. </a:t>
+            </a:r>
+            <a:r>
+              <a:rPr sz="1400" b="1" i="0">
+                <a:solidFill>
                   <a:srgbClr val="11202B"/>
                 </a:solidFill>
                 <a:latin typeface="Malgun Gothic"/>
@@ -6620,6 +6706,57 @@
                 <a:cs typeface="Malgun Gothic"/>
               </a:rPr>
               <a:t> 남은 U6과 U2가 서로 염기쌍을 이루어 촉매 중심을 만들고, U5가 두 exon의 말단을 가까이 붙잡는다(활성화된 B* complex).</a:t>
+            </a:r>
+          </a:p>
+          <a:p>
+            <a:pPr>
+              <a:spcAft>
+                <a:spcPts val="900"/>
+              </a:spcAft>
+            </a:pPr>
+            <a:r>
+              <a:rPr sz="1400" b="1" i="0">
+                <a:solidFill>
+                  <a:srgbClr val="F2B705"/>
+                </a:solidFill>
+                <a:latin typeface="Malgun Gothic"/>
+                <a:ea typeface="Malgun Gothic"/>
+                <a:cs typeface="Malgun Gothic"/>
+              </a:rPr>
+              <a:t>•  </a:t>
+            </a:r>
+            <a:r>
+              <a:rPr sz="1400" b="0" i="0">
+                <a:solidFill>
+                  <a:srgbClr val="11202B"/>
+                </a:solidFill>
+                <a:latin typeface="Malgun Gothic"/>
+                <a:ea typeface="Malgun Gothic"/>
+                <a:cs typeface="Malgun Gothic"/>
+              </a:rPr>
+              <a:t>촉매 반응은 두 번의 </a:t>
+            </a:r>
+            <a:r>
+              <a:rPr sz="1400" b="1" i="0">
+                <a:solidFill>
+                  <a:srgbClr val="11202B"/>
+                </a:solidFill>
+                <a:latin typeface="Malgun Gothic"/>
+                <a:ea typeface="Malgun Gothic"/>
+                <a:cs typeface="Malgun Gothic"/>
+              </a:rPr>
+              <a:t>transesterification</a:t>
+            </a:r>
+            <a:r>
+              <a:rPr sz="1400" b="0" i="0">
+                <a:solidFill>
+                  <a:srgbClr val="11202B"/>
+                </a:solidFill>
+                <a:latin typeface="Malgun Gothic"/>
+                <a:ea typeface="Malgun Gothic"/>
+                <a:cs typeface="Malgun Gothic"/>
+              </a:rPr>
+              <a:t>이다. 각 단계에서 포스포다이에스터 결합 하나가 끊기고 하나가 새로 생기므로, 반응 전체에 ATP가 소비되지 않는다. ATP는 조립과 재배열에 쓰인다.</a:t>
             </a:r>
           </a:p>
         </p:txBody>
@@ -6889,57 +7026,6 @@
             <a:spAutoFit/>
           </a:bodyPr>
           <a:lstStyle/>
-          <a:p>
-            <a:pPr>
-              <a:spcAft>
-                <a:spcPts val="900"/>
-              </a:spcAft>
-            </a:pPr>
-            <a:r>
-              <a:rPr sz="1800" b="1" i="0">
-                <a:solidFill>
-                  <a:srgbClr val="F2B705"/>
-                </a:solidFill>
-                <a:latin typeface="Malgun Gothic"/>
-                <a:ea typeface="Malgun Gothic"/>
-                <a:cs typeface="Malgun Gothic"/>
-              </a:rPr>
-              <a:t>•  </a:t>
-            </a:r>
-            <a:r>
-              <a:rPr sz="1800" b="0" i="0">
-                <a:solidFill>
-                  <a:srgbClr val="11202B"/>
-                </a:solidFill>
-                <a:latin typeface="Malgun Gothic"/>
-                <a:ea typeface="Malgun Gothic"/>
-                <a:cs typeface="Malgun Gothic"/>
-              </a:rPr>
-              <a:t>촉매 반응은 두 번의 </a:t>
-            </a:r>
-            <a:r>
-              <a:rPr sz="1800" b="1" i="0">
-                <a:solidFill>
-                  <a:srgbClr val="11202B"/>
-                </a:solidFill>
-                <a:latin typeface="Malgun Gothic"/>
-                <a:ea typeface="Malgun Gothic"/>
-                <a:cs typeface="Malgun Gothic"/>
-              </a:rPr>
-              <a:t>transesterification</a:t>
-            </a:r>
-            <a:r>
-              <a:rPr sz="1800" b="0" i="0">
-                <a:solidFill>
-                  <a:srgbClr val="11202B"/>
-                </a:solidFill>
-                <a:latin typeface="Malgun Gothic"/>
-                <a:ea typeface="Malgun Gothic"/>
-                <a:cs typeface="Malgun Gothic"/>
-              </a:rPr>
-              <a:t>이다. 각 단계에서 포스포다이에스터 결합 하나가 끊기고 하나가 새로 생기므로, 반응 전체에 ATP가 소비되지 않는다. ATP는 조립과 재배열에 쓰인다.</a:t>
-            </a:r>
-          </a:p>
           <a:p>
             <a:pPr>
               <a:spcAft>
@@ -11418,6 +11504,57 @@
               <a:t>가 된다. 지중해 지역에서 가장 흔한 변이 중 하나다.</a:t>
             </a:r>
           </a:p>
+          <a:p>
+            <a:pPr>
+              <a:spcAft>
+                <a:spcPts val="900"/>
+              </a:spcAft>
+            </a:pPr>
+            <a:r>
+              <a:rPr sz="1400" b="1" i="0">
+                <a:solidFill>
+                  <a:srgbClr val="F2B705"/>
+                </a:solidFill>
+                <a:latin typeface="Malgun Gothic"/>
+                <a:ea typeface="Malgun Gothic"/>
+                <a:cs typeface="Malgun Gothic"/>
+              </a:rPr>
+              <a:t>•  </a:t>
+            </a:r>
+            <a:r>
+              <a:rPr sz="1400" b="1" i="0">
+                <a:solidFill>
+                  <a:srgbClr val="11202B"/>
+                </a:solidFill>
+                <a:latin typeface="Malgun Gothic"/>
+                <a:ea typeface="Malgun Gothic"/>
+                <a:cs typeface="Malgun Gothic"/>
+              </a:rPr>
+              <a:t>exon 내부의 침묵 변이</a:t>
+            </a:r>
+            <a:r>
+              <a:rPr sz="1400" b="0" i="0">
+                <a:solidFill>
+                  <a:srgbClr val="11202B"/>
+                </a:solidFill>
+                <a:latin typeface="Malgun Gothic"/>
+                <a:ea typeface="Malgun Gothic"/>
+                <a:cs typeface="Malgun Gothic"/>
+              </a:rPr>
+              <a:t>: codon 24의 GGT→GGA는 아미노산을 바꾸지 않는다(둘 다 glycine). 그런데 이 치환이 exon 1 내부에 5' splice site consensus와 닮은 서열을 만들어 cryptic donor로 쓰이게 한다. </a:t>
+            </a:r>
+            <a:r>
+              <a:rPr sz="1400" b="1" i="0">
+                <a:solidFill>
+                  <a:srgbClr val="11202B"/>
+                </a:solidFill>
+                <a:latin typeface="Malgun Gothic"/>
+                <a:ea typeface="Malgun Gothic"/>
+                <a:cs typeface="Malgun Gothic"/>
+              </a:rPr>
+              <a:t>단백질 서열이 그대로인 변이가 질환을 만드는 이유가 splicing에 있다.</a:t>
+            </a:r>
+          </a:p>
         </p:txBody>
       </p:sp>
     </p:spTree>
@@ -11692,7 +11829,7 @@
               </a:spcAft>
             </a:pPr>
             <a:r>
-              <a:rPr sz="1800" b="1" i="0">
+              <a:rPr sz="2000" b="1" i="0">
                 <a:solidFill>
                   <a:srgbClr val="F2B705"/>
                 </a:solidFill>
@@ -11703,58 +11840,7 @@
               <a:t>•  </a:t>
             </a:r>
             <a:r>
-              <a:rPr sz="1800" b="1" i="0">
-                <a:solidFill>
-                  <a:srgbClr val="11202B"/>
-                </a:solidFill>
-                <a:latin typeface="Malgun Gothic"/>
-                <a:ea typeface="Malgun Gothic"/>
-                <a:cs typeface="Malgun Gothic"/>
-              </a:rPr>
-              <a:t>exon 내부의 침묵 변이</a:t>
-            </a:r>
-            <a:r>
-              <a:rPr sz="1800" b="0" i="0">
-                <a:solidFill>
-                  <a:srgbClr val="11202B"/>
-                </a:solidFill>
-                <a:latin typeface="Malgun Gothic"/>
-                <a:ea typeface="Malgun Gothic"/>
-                <a:cs typeface="Malgun Gothic"/>
-              </a:rPr>
-              <a:t>: codon 24의 GGT→GGA는 아미노산을 바꾸지 않는다(둘 다 glycine). 그런데 이 치환이 exon 1 내부에 5' splice site consensus와 닮은 서열을 만들어 cryptic donor로 쓰이게 한다. </a:t>
-            </a:r>
-            <a:r>
-              <a:rPr sz="1800" b="1" i="0">
-                <a:solidFill>
-                  <a:srgbClr val="11202B"/>
-                </a:solidFill>
-                <a:latin typeface="Malgun Gothic"/>
-                <a:ea typeface="Malgun Gothic"/>
-                <a:cs typeface="Malgun Gothic"/>
-              </a:rPr>
-              <a:t>단백질 서열이 그대로인 변이가 질환을 만드는 이유가 splicing에 있다.</a:t>
-            </a:r>
-          </a:p>
-          <a:p>
-            <a:pPr>
-              <a:spcAft>
-                <a:spcPts val="900"/>
-              </a:spcAft>
-            </a:pPr>
-            <a:r>
-              <a:rPr sz="1800" b="1" i="0">
-                <a:solidFill>
-                  <a:srgbClr val="F2B705"/>
-                </a:solidFill>
-                <a:latin typeface="Malgun Gothic"/>
-                <a:ea typeface="Malgun Gothic"/>
-                <a:cs typeface="Malgun Gothic"/>
-              </a:rPr>
-              <a:t>•  </a:t>
-            </a:r>
-            <a:r>
-              <a:rPr sz="1800" b="1" i="0">
+              <a:rPr sz="2000" b="1" i="0">
                 <a:solidFill>
                   <a:srgbClr val="11202B"/>
                 </a:solidFill>
@@ -11765,7 +11851,7 @@
               <a:t>먼 intron 내부의 변이</a:t>
             </a:r>
             <a:r>
-              <a:rPr sz="1800" b="0" i="0">
+              <a:rPr sz="2000" b="0" i="0">
                 <a:solidFill>
                   <a:srgbClr val="11202B"/>
                 </a:solidFill>
@@ -16565,11 +16651,40 @@
                 <a:ea typeface="Malgun Gothic"/>
                 <a:cs typeface="Malgun Gothic"/>
               </a:rPr>
-              <a:t>이다. 2. </a:t>
-            </a:r>
+              <a:t>이다.</a:t>
+            </a:r>
+          </a:p>
+          <a:p>
+            <a:pPr>
+              <a:spcAft>
+                <a:spcPts val="900"/>
+              </a:spcAft>
+            </a:pPr>
             <a:r>
               <a:rPr sz="1400" b="1" i="0">
                 <a:solidFill>
+                  <a:srgbClr val="F2B705"/>
+                </a:solidFill>
+                <a:latin typeface="Malgun Gothic"/>
+                <a:ea typeface="Malgun Gothic"/>
+                <a:cs typeface="Malgun Gothic"/>
+              </a:rPr>
+              <a:t>•  </a:t>
+            </a:r>
+            <a:r>
+              <a:rPr sz="1400" b="0" i="0">
+                <a:solidFill>
+                  <a:srgbClr val="11202B"/>
+                </a:solidFill>
+                <a:latin typeface="Malgun Gothic"/>
+                <a:ea typeface="Malgun Gothic"/>
+                <a:cs typeface="Malgun Gothic"/>
+              </a:rPr>
+              <a:t>2. </a:t>
+            </a:r>
+            <a:r>
+              <a:rPr sz="1400" b="1" i="0">
+                <a:solidFill>
                   <a:srgbClr val="11202B"/>
                 </a:solidFill>
                 <a:latin typeface="Malgun Gothic"/>
@@ -16587,7 +16702,36 @@
                 <a:ea typeface="Malgun Gothic"/>
                 <a:cs typeface="Malgun Gothic"/>
               </a:rPr>
-              <a:t>: DCP2가 cap을 제거한다. 3. </a:t>
+              <a:t>: DCP2가 cap을 제거한다.</a:t>
+            </a:r>
+          </a:p>
+          <a:p>
+            <a:pPr>
+              <a:spcAft>
+                <a:spcPts val="900"/>
+              </a:spcAft>
+            </a:pPr>
+            <a:r>
+              <a:rPr sz="1400" b="1" i="0">
+                <a:solidFill>
+                  <a:srgbClr val="F2B705"/>
+                </a:solidFill>
+                <a:latin typeface="Malgun Gothic"/>
+                <a:ea typeface="Malgun Gothic"/>
+                <a:cs typeface="Malgun Gothic"/>
+              </a:rPr>
+              <a:t>•  </a:t>
+            </a:r>
+            <a:r>
+              <a:rPr sz="1400" b="0" i="0">
+                <a:solidFill>
+                  <a:srgbClr val="11202B"/>
+                </a:solidFill>
+                <a:latin typeface="Malgun Gothic"/>
+                <a:ea typeface="Malgun Gothic"/>
+                <a:cs typeface="Malgun Gothic"/>
+              </a:rPr>
+              <a:t>3. </a:t>
             </a:r>
             <a:r>
               <a:rPr sz="1400" b="1" i="0">
@@ -18101,139 +18245,7 @@
                 <a:ea typeface="Malgun Gothic"/>
                 <a:cs typeface="Malgun Gothic"/>
               </a:rPr>
-              <a:t>를 전사한다. 머리핀 구조를 포함한다. 2. 핵에서 </a:t>
-            </a:r>
-            <a:r>
-              <a:rPr sz="1400" b="1" i="0">
-                <a:solidFill>
-                  <a:srgbClr val="11202B"/>
-                </a:solidFill>
-                <a:latin typeface="Malgun Gothic"/>
-                <a:ea typeface="Malgun Gothic"/>
-                <a:cs typeface="Malgun Gothic"/>
-              </a:rPr>
-              <a:t>Drosha-DGCR8</a:t>
-            </a:r>
-            <a:r>
-              <a:rPr sz="1400" b="0" i="0">
-                <a:solidFill>
-                  <a:srgbClr val="11202B"/>
-                </a:solidFill>
-                <a:latin typeface="Malgun Gothic"/>
-                <a:ea typeface="Malgun Gothic"/>
-                <a:cs typeface="Malgun Gothic"/>
-              </a:rPr>
-              <a:t>이 머리핀을 잘라 약 70 뉴클레오타이드의 </a:t>
-            </a:r>
-            <a:r>
-              <a:rPr sz="1400" b="1" i="0">
-                <a:solidFill>
-                  <a:srgbClr val="11202B"/>
-                </a:solidFill>
-                <a:latin typeface="Malgun Gothic"/>
-                <a:ea typeface="Malgun Gothic"/>
-                <a:cs typeface="Malgun Gothic"/>
-              </a:rPr>
-              <a:t>pre-miRNA</a:t>
-            </a:r>
-            <a:r>
-              <a:rPr sz="1400" b="0" i="0">
-                <a:solidFill>
-                  <a:srgbClr val="11202B"/>
-                </a:solidFill>
-                <a:latin typeface="Malgun Gothic"/>
-                <a:ea typeface="Malgun Gothic"/>
-                <a:cs typeface="Malgun Gothic"/>
-              </a:rPr>
-              <a:t>를 만든다. 3. </a:t>
-            </a:r>
-            <a:r>
-              <a:rPr sz="1400" b="1" i="0">
-                <a:solidFill>
-                  <a:srgbClr val="11202B"/>
-                </a:solidFill>
-                <a:latin typeface="Malgun Gothic"/>
-                <a:ea typeface="Malgun Gothic"/>
-                <a:cs typeface="Malgun Gothic"/>
-              </a:rPr>
-              <a:t>Exportin-5</a:t>
-            </a:r>
-            <a:r>
-              <a:rPr sz="1400" b="0" i="0">
-                <a:solidFill>
-                  <a:srgbClr val="11202B"/>
-                </a:solidFill>
-                <a:latin typeface="Malgun Gothic"/>
-                <a:ea typeface="Malgun Gothic"/>
-                <a:cs typeface="Malgun Gothic"/>
-              </a:rPr>
-              <a:t>가 세포질로 수출한다. 4. 세포질에서 </a:t>
-            </a:r>
-            <a:r>
-              <a:rPr sz="1400" b="1" i="0">
-                <a:solidFill>
-                  <a:srgbClr val="11202B"/>
-                </a:solidFill>
-                <a:latin typeface="Malgun Gothic"/>
-                <a:ea typeface="Malgun Gothic"/>
-                <a:cs typeface="Malgun Gothic"/>
-              </a:rPr>
-              <a:t>Dicer</a:t>
-            </a:r>
-            <a:r>
-              <a:rPr sz="1400" b="0" i="0">
-                <a:solidFill>
-                  <a:srgbClr val="11202B"/>
-                </a:solidFill>
-                <a:latin typeface="Malgun Gothic"/>
-                <a:ea typeface="Malgun Gothic"/>
-                <a:cs typeface="Malgun Gothic"/>
-              </a:rPr>
-              <a:t>가 머리핀의 고리를 잘라 이중사슬을 만든다. 5. 한 가닥이 </a:t>
-            </a:r>
-            <a:r>
-              <a:rPr sz="1400" b="1" i="0">
-                <a:solidFill>
-                  <a:srgbClr val="11202B"/>
-                </a:solidFill>
-                <a:latin typeface="Malgun Gothic"/>
-                <a:ea typeface="Malgun Gothic"/>
-                <a:cs typeface="Malgun Gothic"/>
-              </a:rPr>
-              <a:t>Argonaute</a:t>
-            </a:r>
-            <a:r>
-              <a:rPr sz="1400" b="0" i="0">
-                <a:solidFill>
-                  <a:srgbClr val="11202B"/>
-                </a:solidFill>
-                <a:latin typeface="Malgun Gothic"/>
-                <a:ea typeface="Malgun Gothic"/>
-                <a:cs typeface="Malgun Gothic"/>
-              </a:rPr>
-              <a:t> 단백질에 실려 </a:t>
-            </a:r>
-            <a:r>
-              <a:rPr sz="1400" b="1" i="0">
-                <a:solidFill>
-                  <a:srgbClr val="11202B"/>
-                </a:solidFill>
-                <a:latin typeface="Malgun Gothic"/>
-                <a:ea typeface="Malgun Gothic"/>
-                <a:cs typeface="Malgun Gothic"/>
-              </a:rPr>
-              <a:t>RISC</a:t>
-            </a:r>
-            <a:r>
-              <a:rPr sz="1400" b="0" i="0">
-                <a:solidFill>
-                  <a:srgbClr val="11202B"/>
-                </a:solidFill>
-                <a:latin typeface="Malgun Gothic"/>
-                <a:ea typeface="Malgun Gothic"/>
-                <a:cs typeface="Malgun Gothic"/>
-              </a:rPr>
-              <a:t>(RNA-induced silencing complex)를 이룬다.</a:t>
+              <a:t>를 전사한다. 머리핀 구조를 포함한다.</a:t>
             </a:r>
           </a:p>
           <a:p>
@@ -18262,7 +18274,7 @@
                 <a:ea typeface="Malgun Gothic"/>
                 <a:cs typeface="Malgun Gothic"/>
               </a:rPr>
-              <a:t>표적 인식은 miRNA의 2~8번 뉴클레오타이드인 </a:t>
+              <a:t>2. 핵에서 </a:t>
             </a:r>
             <a:r>
               <a:rPr sz="1400" b="1" i="0">
@@ -18273,7 +18285,7 @@
                 <a:ea typeface="Malgun Gothic"/>
                 <a:cs typeface="Malgun Gothic"/>
               </a:rPr>
-              <a:t>seed 영역</a:t>
+              <a:t>Drosha-DGCR8</a:t>
             </a:r>
             <a:r>
               <a:rPr sz="1400" b="0" i="0">
@@ -18284,7 +18296,7 @@
                 <a:ea typeface="Malgun Gothic"/>
                 <a:cs typeface="Malgun Gothic"/>
               </a:rPr>
-              <a:t>과 mRNA 3' UTR의 염기쌍 형성으로 일어난다. 동물에서는 상보성이 완전하지 않은 경우가 많아 절단보다 </a:t>
+              <a:t>이 머리핀을 잘라 약 70 뉴클레오타이드의 </a:t>
             </a:r>
             <a:r>
               <a:rPr sz="1400" b="1" i="0">
@@ -18295,7 +18307,7 @@
                 <a:ea typeface="Malgun Gothic"/>
                 <a:cs typeface="Malgun Gothic"/>
               </a:rPr>
-              <a:t>번역 억제와 deadenylation을 통한 분해 촉진</a:t>
+              <a:t>pre-miRNA</a:t>
             </a:r>
             <a:r>
               <a:rPr sz="1400" b="0" i="0">
@@ -18306,7 +18318,7 @@
                 <a:ea typeface="Malgun Gothic"/>
                 <a:cs typeface="Malgun Gothic"/>
               </a:rPr>
-              <a:t>이 주된 결과다. 상보성이 완전하면 siRNA처럼 절단이 일어난다. seed가 짧으므로 하나의 miRNA가 수백 개의 mRNA를 조절하고, 하나의 mRNA가 여러 miRNA의 표적이 된다.</a:t>
+              <a:t>를 만든다.</a:t>
             </a:r>
           </a:p>
           <a:p>
@@ -18335,7 +18347,335 @@
                 <a:ea typeface="Malgun Gothic"/>
                 <a:cs typeface="Malgun Gothic"/>
               </a:rPr>
+              <a:t>3. </a:t>
+            </a:r>
+            <a:r>
+              <a:rPr sz="1400" b="1" i="0">
+                <a:solidFill>
+                  <a:srgbClr val="11202B"/>
+                </a:solidFill>
+                <a:latin typeface="Malgun Gothic"/>
+                <a:ea typeface="Malgun Gothic"/>
+                <a:cs typeface="Malgun Gothic"/>
+              </a:rPr>
+              <a:t>Exportin-5</a:t>
+            </a:r>
+            <a:r>
+              <a:rPr sz="1400" b="0" i="0">
+                <a:solidFill>
+                  <a:srgbClr val="11202B"/>
+                </a:solidFill>
+                <a:latin typeface="Malgun Gothic"/>
+                <a:ea typeface="Malgun Gothic"/>
+                <a:cs typeface="Malgun Gothic"/>
+              </a:rPr>
+              <a:t>가 세포질로 수출한다.</a:t>
+            </a:r>
+          </a:p>
+          <a:p>
+            <a:pPr>
+              <a:spcAft>
+                <a:spcPts val="900"/>
+              </a:spcAft>
+            </a:pPr>
+            <a:r>
+              <a:rPr sz="1400" b="1" i="0">
+                <a:solidFill>
+                  <a:srgbClr val="F2B705"/>
+                </a:solidFill>
+                <a:latin typeface="Malgun Gothic"/>
+                <a:ea typeface="Malgun Gothic"/>
+                <a:cs typeface="Malgun Gothic"/>
+              </a:rPr>
+              <a:t>•  </a:t>
+            </a:r>
+            <a:r>
+              <a:rPr sz="1400" b="0" i="0">
+                <a:solidFill>
+                  <a:srgbClr val="11202B"/>
+                </a:solidFill>
+                <a:latin typeface="Malgun Gothic"/>
+                <a:ea typeface="Malgun Gothic"/>
+                <a:cs typeface="Malgun Gothic"/>
+              </a:rPr>
+              <a:t>4. 세포질에서 </a:t>
+            </a:r>
+            <a:r>
+              <a:rPr sz="1400" b="1" i="0">
+                <a:solidFill>
+                  <a:srgbClr val="11202B"/>
+                </a:solidFill>
+                <a:latin typeface="Malgun Gothic"/>
+                <a:ea typeface="Malgun Gothic"/>
+                <a:cs typeface="Malgun Gothic"/>
+              </a:rPr>
+              <a:t>Dicer</a:t>
+            </a:r>
+            <a:r>
+              <a:rPr sz="1400" b="0" i="0">
+                <a:solidFill>
+                  <a:srgbClr val="11202B"/>
+                </a:solidFill>
+                <a:latin typeface="Malgun Gothic"/>
+                <a:ea typeface="Malgun Gothic"/>
+                <a:cs typeface="Malgun Gothic"/>
+              </a:rPr>
+              <a:t>가 머리핀의 고리를 잘라 이중사슬을 만든다.</a:t>
+            </a:r>
+          </a:p>
+          <a:p>
+            <a:pPr>
+              <a:spcAft>
+                <a:spcPts val="900"/>
+              </a:spcAft>
+            </a:pPr>
+            <a:r>
+              <a:rPr sz="1400" b="1" i="0">
+                <a:solidFill>
+                  <a:srgbClr val="F2B705"/>
+                </a:solidFill>
+                <a:latin typeface="Malgun Gothic"/>
+                <a:ea typeface="Malgun Gothic"/>
+                <a:cs typeface="Malgun Gothic"/>
+              </a:rPr>
+              <a:t>•  </a:t>
+            </a:r>
+            <a:r>
+              <a:rPr sz="1400" b="0" i="0">
+                <a:solidFill>
+                  <a:srgbClr val="11202B"/>
+                </a:solidFill>
+                <a:latin typeface="Malgun Gothic"/>
+                <a:ea typeface="Malgun Gothic"/>
+                <a:cs typeface="Malgun Gothic"/>
+              </a:rPr>
+              <a:t>5. 한 가닥이 </a:t>
+            </a:r>
+            <a:r>
+              <a:rPr sz="1400" b="1" i="0">
+                <a:solidFill>
+                  <a:srgbClr val="11202B"/>
+                </a:solidFill>
+                <a:latin typeface="Malgun Gothic"/>
+                <a:ea typeface="Malgun Gothic"/>
+                <a:cs typeface="Malgun Gothic"/>
+              </a:rPr>
+              <a:t>Argonaute</a:t>
+            </a:r>
+            <a:r>
+              <a:rPr sz="1400" b="0" i="0">
+                <a:solidFill>
+                  <a:srgbClr val="11202B"/>
+                </a:solidFill>
+                <a:latin typeface="Malgun Gothic"/>
+                <a:ea typeface="Malgun Gothic"/>
+                <a:cs typeface="Malgun Gothic"/>
+              </a:rPr>
+              <a:t> 단백질에 실려 </a:t>
+            </a:r>
+            <a:r>
+              <a:rPr sz="1400" b="1" i="0">
+                <a:solidFill>
+                  <a:srgbClr val="11202B"/>
+                </a:solidFill>
+                <a:latin typeface="Malgun Gothic"/>
+                <a:ea typeface="Malgun Gothic"/>
+                <a:cs typeface="Malgun Gothic"/>
+              </a:rPr>
+              <a:t>RISC</a:t>
+            </a:r>
+            <a:r>
+              <a:rPr sz="1400" b="0" i="0">
+                <a:solidFill>
+                  <a:srgbClr val="11202B"/>
+                </a:solidFill>
+                <a:latin typeface="Malgun Gothic"/>
+                <a:ea typeface="Malgun Gothic"/>
+                <a:cs typeface="Malgun Gothic"/>
+              </a:rPr>
+              <a:t>(RNA-induced silencing complex)를 이룬다.</a:t>
+            </a:r>
+          </a:p>
+          <a:p>
+            <a:pPr>
+              <a:spcAft>
+                <a:spcPts val="900"/>
+              </a:spcAft>
+            </a:pPr>
+            <a:r>
+              <a:rPr sz="1400" b="1" i="0">
+                <a:solidFill>
+                  <a:srgbClr val="F2B705"/>
+                </a:solidFill>
+                <a:latin typeface="Malgun Gothic"/>
+                <a:ea typeface="Malgun Gothic"/>
+                <a:cs typeface="Malgun Gothic"/>
+              </a:rPr>
+              <a:t>•  </a:t>
+            </a:r>
+            <a:r>
+              <a:rPr sz="1400" b="0" i="0">
+                <a:solidFill>
+                  <a:srgbClr val="11202B"/>
+                </a:solidFill>
+                <a:latin typeface="Malgun Gothic"/>
+                <a:ea typeface="Malgun Gothic"/>
+                <a:cs typeface="Malgun Gothic"/>
+              </a:rPr>
+              <a:t>표적 인식은 miRNA의 2~8번 뉴클레오타이드인 </a:t>
+            </a:r>
+            <a:r>
+              <a:rPr sz="1400" b="1" i="0">
+                <a:solidFill>
+                  <a:srgbClr val="11202B"/>
+                </a:solidFill>
+                <a:latin typeface="Malgun Gothic"/>
+                <a:ea typeface="Malgun Gothic"/>
+                <a:cs typeface="Malgun Gothic"/>
+              </a:rPr>
+              <a:t>seed 영역</a:t>
+            </a:r>
+            <a:r>
+              <a:rPr sz="1400" b="0" i="0">
+                <a:solidFill>
+                  <a:srgbClr val="11202B"/>
+                </a:solidFill>
+                <a:latin typeface="Malgun Gothic"/>
+                <a:ea typeface="Malgun Gothic"/>
+                <a:cs typeface="Malgun Gothic"/>
+              </a:rPr>
+              <a:t>과 mRNA 3' UTR의 염기쌍 형성으로 일어난다. 동물에서는 상보성이 완전하지 않은 경우가 많아 절단보다 </a:t>
+            </a:r>
+            <a:r>
+              <a:rPr sz="1400" b="1" i="0">
+                <a:solidFill>
+                  <a:srgbClr val="11202B"/>
+                </a:solidFill>
+                <a:latin typeface="Malgun Gothic"/>
+                <a:ea typeface="Malgun Gothic"/>
+                <a:cs typeface="Malgun Gothic"/>
+              </a:rPr>
+              <a:t>번역 억제와 deadenylation을 통한 분해 촉진</a:t>
+            </a:r>
+            <a:r>
+              <a:rPr sz="1400" b="0" i="0">
+                <a:solidFill>
+                  <a:srgbClr val="11202B"/>
+                </a:solidFill>
+                <a:latin typeface="Malgun Gothic"/>
+                <a:ea typeface="Malgun Gothic"/>
+                <a:cs typeface="Malgun Gothic"/>
+              </a:rPr>
+              <a:t>이 주된 결과다. 상보성이 완전하면 siRNA처럼 절단이 일어난다. seed가 짧으므로 하나의 miRNA가 수백 개의 mRNA를 조절하고, 하나의 mRNA가 여러 miRNA의 표적이 된다.</a:t>
+            </a:r>
+          </a:p>
+          <a:p>
+            <a:pPr>
+              <a:spcAft>
+                <a:spcPts val="900"/>
+              </a:spcAft>
+            </a:pPr>
+            <a:r>
+              <a:rPr sz="1400" b="1" i="0">
+                <a:solidFill>
+                  <a:srgbClr val="F2B705"/>
+                </a:solidFill>
+                <a:latin typeface="Malgun Gothic"/>
+                <a:ea typeface="Malgun Gothic"/>
+                <a:cs typeface="Malgun Gothic"/>
+              </a:rPr>
+              <a:t>•  </a:t>
+            </a:r>
+            <a:r>
+              <a:rPr sz="1400" b="0" i="0">
+                <a:solidFill>
+                  <a:srgbClr val="11202B"/>
+                </a:solidFill>
+                <a:latin typeface="Malgun Gothic"/>
+                <a:ea typeface="Malgun Gothic"/>
+                <a:cs typeface="Malgun Gothic"/>
+              </a:rPr>
               <a:t>의학적 함의는 세 방향이다.</a:t>
+            </a:r>
+          </a:p>
+          <a:p>
+            <a:pPr>
+              <a:spcAft>
+                <a:spcPts val="900"/>
+              </a:spcAft>
+            </a:pPr>
+            <a:r>
+              <a:rPr sz="1400" b="1" i="0">
+                <a:solidFill>
+                  <a:srgbClr val="F2B705"/>
+                </a:solidFill>
+                <a:latin typeface="Malgun Gothic"/>
+                <a:ea typeface="Malgun Gothic"/>
+                <a:cs typeface="Malgun Gothic"/>
+              </a:rPr>
+              <a:t>•  </a:t>
+            </a:r>
+            <a:r>
+              <a:rPr sz="1400" b="1" i="0">
+                <a:solidFill>
+                  <a:srgbClr val="11202B"/>
+                </a:solidFill>
+                <a:latin typeface="Malgun Gothic"/>
+                <a:ea typeface="Malgun Gothic"/>
+                <a:cs typeface="Malgun Gothic"/>
+              </a:rPr>
+              <a:t>miRNA 자체의 이상이 질환을 만든다.</a:t>
+            </a:r>
+            <a:r>
+              <a:rPr sz="1400" b="0" i="0">
+                <a:solidFill>
+                  <a:srgbClr val="11202B"/>
+                </a:solidFill>
+                <a:latin typeface="Malgun Gothic"/>
+                <a:ea typeface="Malgun Gothic"/>
+                <a:cs typeface="Malgun Gothic"/>
+              </a:rPr>
+              <a:t> *DGCR8*이 포함된 22q11.2 결손증후군은 miRNA 생성 감소를 동반한다. 암에서는 miR-15a/16-1 결손이 만성 림프구성 백혈병의 13q14 결손 영역과 겹치고, miR-17-92 군집은 증폭되어 종양 촉진으로 작용한다.</a:t>
+            </a:r>
+          </a:p>
+          <a:p>
+            <a:pPr>
+              <a:spcAft>
+                <a:spcPts val="900"/>
+              </a:spcAft>
+            </a:pPr>
+            <a:r>
+              <a:rPr sz="1400" b="1" i="0">
+                <a:solidFill>
+                  <a:srgbClr val="F2B705"/>
+                </a:solidFill>
+                <a:latin typeface="Malgun Gothic"/>
+                <a:ea typeface="Malgun Gothic"/>
+                <a:cs typeface="Malgun Gothic"/>
+              </a:rPr>
+              <a:t>•  </a:t>
+            </a:r>
+            <a:r>
+              <a:rPr sz="1400" b="1" i="0">
+                <a:solidFill>
+                  <a:srgbClr val="11202B"/>
+                </a:solidFill>
+                <a:latin typeface="Malgun Gothic"/>
+                <a:ea typeface="Malgun Gothic"/>
+                <a:cs typeface="Malgun Gothic"/>
+              </a:rPr>
+              <a:t>miRNA 양상이 진단 지표가 된다.</a:t>
+            </a:r>
+            <a:r>
+              <a:rPr sz="1400" b="0" i="0">
+                <a:solidFill>
+                  <a:srgbClr val="11202B"/>
+                </a:solidFill>
+                <a:latin typeface="Malgun Gothic"/>
+                <a:ea typeface="Malgun Gothic"/>
+                <a:cs typeface="Malgun Gothic"/>
+              </a:rPr>
+              <a:t> 혈장 miRNA는 비교적 안정해 조직 기원 추정에 쓰인다.</a:t>
             </a:r>
           </a:p>
         </p:txBody>
@@ -18612,7 +18952,7 @@
               </a:spcAft>
             </a:pPr>
             <a:r>
-              <a:rPr sz="1600" b="1" i="0">
+              <a:rPr sz="1800" b="1" i="0">
                 <a:solidFill>
                   <a:srgbClr val="F2B705"/>
                 </a:solidFill>
@@ -18623,87 +18963,7 @@
               <a:t>•  </a:t>
             </a:r>
             <a:r>
-              <a:rPr sz="1600" b="1" i="0">
-                <a:solidFill>
-                  <a:srgbClr val="11202B"/>
-                </a:solidFill>
-                <a:latin typeface="Malgun Gothic"/>
-                <a:ea typeface="Malgun Gothic"/>
-                <a:cs typeface="Malgun Gothic"/>
-              </a:rPr>
-              <a:t>miRNA 자체의 이상이 질환을 만든다.</a:t>
-            </a:r>
-            <a:r>
-              <a:rPr sz="1600" b="0" i="0">
-                <a:solidFill>
-                  <a:srgbClr val="11202B"/>
-                </a:solidFill>
-                <a:latin typeface="Malgun Gothic"/>
-                <a:ea typeface="Malgun Gothic"/>
-                <a:cs typeface="Malgun Gothic"/>
-              </a:rPr>
-              <a:t> *DGCR8*이 포함된 22q11.2 결손증후군은 miRNA 생성 감소를 동반한다. 암에서는 miR-15a/16-1 결손이 만성 림프구성 백혈병의 13q14 결손 영역과 겹치고, miR-17-92 군집은 증폭되어 종양 촉진으로 작용한다.</a:t>
-            </a:r>
-          </a:p>
-          <a:p>
-            <a:pPr>
-              <a:spcAft>
-                <a:spcPts val="900"/>
-              </a:spcAft>
-            </a:pPr>
-            <a:r>
-              <a:rPr sz="1600" b="1" i="0">
-                <a:solidFill>
-                  <a:srgbClr val="F2B705"/>
-                </a:solidFill>
-                <a:latin typeface="Malgun Gothic"/>
-                <a:ea typeface="Malgun Gothic"/>
-                <a:cs typeface="Malgun Gothic"/>
-              </a:rPr>
-              <a:t>•  </a:t>
-            </a:r>
-            <a:r>
-              <a:rPr sz="1600" b="1" i="0">
-                <a:solidFill>
-                  <a:srgbClr val="11202B"/>
-                </a:solidFill>
-                <a:latin typeface="Malgun Gothic"/>
-                <a:ea typeface="Malgun Gothic"/>
-                <a:cs typeface="Malgun Gothic"/>
-              </a:rPr>
-              <a:t>miRNA 양상이 진단 지표가 된다.</a:t>
-            </a:r>
-            <a:r>
-              <a:rPr sz="1600" b="0" i="0">
-                <a:solidFill>
-                  <a:srgbClr val="11202B"/>
-                </a:solidFill>
-                <a:latin typeface="Malgun Gothic"/>
-                <a:ea typeface="Malgun Gothic"/>
-                <a:cs typeface="Malgun Gothic"/>
-              </a:rPr>
-              <a:t> 혈장 miRNA는 비교적 안정해 조직 기원 추정에 쓰인다.</a:t>
-            </a:r>
-          </a:p>
-          <a:p>
-            <a:pPr>
-              <a:spcAft>
-                <a:spcPts val="900"/>
-              </a:spcAft>
-            </a:pPr>
-            <a:r>
-              <a:rPr sz="1600" b="1" i="0">
-                <a:solidFill>
-                  <a:srgbClr val="F2B705"/>
-                </a:solidFill>
-                <a:latin typeface="Malgun Gothic"/>
-                <a:ea typeface="Malgun Gothic"/>
-                <a:cs typeface="Malgun Gothic"/>
-              </a:rPr>
-              <a:t>•  </a:t>
-            </a:r>
-            <a:r>
-              <a:rPr sz="1600" b="1" i="0">
+              <a:rPr sz="1800" b="1" i="0">
                 <a:solidFill>
                   <a:srgbClr val="11202B"/>
                 </a:solidFill>
@@ -18714,7 +18974,7 @@
               <a:t>같은 기전을 치료에 쓴다.</a:t>
             </a:r>
             <a:r>
-              <a:rPr sz="1600" b="0" i="0">
+              <a:rPr sz="1800" b="0" i="0">
                 <a:solidFill>
                   <a:srgbClr val="11202B"/>
                 </a:solidFill>
@@ -18725,7 +18985,7 @@
               <a:t> 합성 </a:t>
             </a:r>
             <a:r>
-              <a:rPr sz="1600" b="1" i="0">
+              <a:rPr sz="1800" b="1" i="0">
                 <a:solidFill>
                   <a:srgbClr val="11202B"/>
                 </a:solidFill>
@@ -18736,7 +18996,7 @@
               <a:t>siRNA</a:t>
             </a:r>
             <a:r>
-              <a:rPr sz="1600" b="0" i="0">
+              <a:rPr sz="1800" b="0" i="0">
                 <a:solidFill>
                   <a:srgbClr val="11202B"/>
                 </a:solidFill>
@@ -18747,7 +19007,7 @@
               <a:t>는 RISC에 실려 표적 mRNA를 절단한다. *PCSK9*를 표적하는 </a:t>
             </a:r>
             <a:r>
-              <a:rPr sz="1600" b="1" i="0">
+              <a:rPr sz="1800" b="1" i="0">
                 <a:solidFill>
                   <a:srgbClr val="11202B"/>
                 </a:solidFill>
@@ -18758,7 +19018,7 @@
               <a:t>inclisiran</a:t>
             </a:r>
             <a:r>
-              <a:rPr sz="1600" b="0" i="0">
+              <a:rPr sz="1800" b="0" i="0">
                 <a:solidFill>
                   <a:srgbClr val="11202B"/>
                 </a:solidFill>
@@ -18769,7 +19029,7 @@
               <a:t>은 GalNAc를 붙여 간세포의 asialoglycoprotein receptor로 전달되며, 6개월에 한 번 피하 주사로 LDL-C를 약 50% 낮춘다. Transthyretin amyloidosis의 </a:t>
             </a:r>
             <a:r>
-              <a:rPr sz="1600" b="1" i="0">
+              <a:rPr sz="1800" b="1" i="0">
                 <a:solidFill>
                   <a:srgbClr val="11202B"/>
                 </a:solidFill>
@@ -18780,7 +19040,7 @@
               <a:t>patisiran</a:t>
             </a:r>
             <a:r>
-              <a:rPr sz="1600" b="0" i="0">
+              <a:rPr sz="1800" b="0" i="0">
                 <a:solidFill>
                   <a:srgbClr val="11202B"/>
                 </a:solidFill>
@@ -18791,7 +19051,7 @@
               <a:t>과 </a:t>
             </a:r>
             <a:r>
-              <a:rPr sz="1600" b="1" i="0">
+              <a:rPr sz="1800" b="1" i="0">
                 <a:solidFill>
                   <a:srgbClr val="11202B"/>
                 </a:solidFill>
@@ -18802,7 +19062,7 @@
               <a:t>vutrisiran</a:t>
             </a:r>
             <a:r>
-              <a:rPr sz="1600" b="0" i="0">
+              <a:rPr sz="1800" b="0" i="0">
                 <a:solidFill>
                   <a:srgbClr val="11202B"/>
                 </a:solidFill>
@@ -18813,7 +19073,7 @@
               <a:t>, 급성 간성 porphyria의 </a:t>
             </a:r>
             <a:r>
-              <a:rPr sz="1600" b="1" i="0">
+              <a:rPr sz="1800" b="1" i="0">
                 <a:solidFill>
                   <a:srgbClr val="11202B"/>
                 </a:solidFill>
@@ -18824,7 +19084,7 @@
               <a:t>givosiran</a:t>
             </a:r>
             <a:r>
-              <a:rPr sz="1600" b="0" i="0">
+              <a:rPr sz="1800" b="0" i="0">
                 <a:solidFill>
                   <a:srgbClr val="11202B"/>
                 </a:solidFill>
@@ -23196,7 +23456,7 @@
                 <a:ea typeface="Malgun Gothic"/>
                 <a:cs typeface="Malgun Gothic"/>
               </a:rPr>
-              <a:t>참고문헌 (1/2)</a:t>
+              <a:t>참고문헌</a:t>
             </a:r>
           </a:p>
         </p:txBody>
@@ -23441,6 +23701,64 @@
                 <a:cs typeface="Malgun Gothic"/>
               </a:rPr>
               <a:t>Mendell JR et al. Eteplirsen for the treatment of Duchenne muscular dystrophy. Ann Neurol 2013;74:637–647.</a:t>
+            </a:r>
+          </a:p>
+          <a:p>
+            <a:pPr>
+              <a:spcAft>
+                <a:spcPts val="900"/>
+              </a:spcAft>
+            </a:pPr>
+            <a:r>
+              <a:rPr sz="1400" b="1" i="0">
+                <a:solidFill>
+                  <a:srgbClr val="F2B705"/>
+                </a:solidFill>
+                <a:latin typeface="Malgun Gothic"/>
+                <a:ea typeface="Malgun Gothic"/>
+                <a:cs typeface="Malgun Gothic"/>
+              </a:rPr>
+              <a:t>•  </a:t>
+            </a:r>
+            <a:r>
+              <a:rPr sz="1400" b="0" i="0">
+                <a:solidFill>
+                  <a:srgbClr val="11202B"/>
+                </a:solidFill>
+                <a:latin typeface="Malgun Gothic"/>
+                <a:ea typeface="Malgun Gothic"/>
+                <a:cs typeface="Malgun Gothic"/>
+              </a:rPr>
+              <a:t>Kurosaki T, Popp MW, Maquat LE. Quality and quantity control of gene expression by nonsense-mediated mRNA decay. Nat Rev Mol Cell Biol 2019;20:406–420.</a:t>
+            </a:r>
+          </a:p>
+          <a:p>
+            <a:pPr>
+              <a:spcAft>
+                <a:spcPts val="900"/>
+              </a:spcAft>
+            </a:pPr>
+            <a:r>
+              <a:rPr sz="1400" b="1" i="0">
+                <a:solidFill>
+                  <a:srgbClr val="F2B705"/>
+                </a:solidFill>
+                <a:latin typeface="Malgun Gothic"/>
+                <a:ea typeface="Malgun Gothic"/>
+                <a:cs typeface="Malgun Gothic"/>
+              </a:rPr>
+              <a:t>•  </a:t>
+            </a:r>
+            <a:r>
+              <a:rPr sz="1400" b="0" i="0">
+                <a:solidFill>
+                  <a:srgbClr val="11202B"/>
+                </a:solidFill>
+                <a:latin typeface="Malgun Gothic"/>
+                <a:ea typeface="Malgun Gothic"/>
+                <a:cs typeface="Malgun Gothic"/>
+              </a:rPr>
+              <a:t>Bartel DP. Metazoan microRNAs. Cell 2018;173:20–51.</a:t>
             </a:r>
           </a:p>
         </p:txBody>
@@ -23717,7 +24035,7 @@
               </a:spcAft>
             </a:pPr>
             <a:r>
-              <a:rPr sz="1600" b="1" i="0">
+              <a:rPr sz="1400" b="1" i="0">
                 <a:solidFill>
                   <a:srgbClr val="F2B705"/>
                 </a:solidFill>
@@ -23728,7 +24046,7 @@
               <a:t>•  </a:t>
             </a:r>
             <a:r>
-              <a:rPr sz="1600" b="0" i="0">
+              <a:rPr sz="1400" b="0" i="0">
                 <a:solidFill>
                   <a:srgbClr val="11202B"/>
                 </a:solidFill>
@@ -23739,7 +24057,7 @@
               <a:t>진핵세포의 단백질 암호화 유전자는 </a:t>
             </a:r>
             <a:r>
-              <a:rPr sz="1600" b="1" i="0">
+              <a:rPr sz="1400" b="1" i="0">
                 <a:solidFill>
                   <a:srgbClr val="11202B"/>
                 </a:solidFill>
@@ -23750,7 +24068,7 @@
               <a:t>split gene</a:t>
             </a:r>
             <a:r>
-              <a:rPr sz="1600" b="0" i="0">
+              <a:rPr sz="1400" b="0" i="0">
                 <a:solidFill>
                   <a:srgbClr val="11202B"/>
                 </a:solidFill>
@@ -23761,7 +24079,7 @@
               <a:t>이다. 암호 서열(exon)이 암호가 아닌 서열(intron)에 의해 끊겨 있다. RNA polymerase II는 유전자 전체를 한 가닥의 </a:t>
             </a:r>
             <a:r>
-              <a:rPr sz="1600" b="1" i="0">
+              <a:rPr sz="1400" b="1" i="0">
                 <a:solidFill>
                   <a:srgbClr val="11202B"/>
                 </a:solidFill>
@@ -23772,7 +24090,7 @@
               <a:t>pre-mRNA</a:t>
             </a:r>
             <a:r>
-              <a:rPr sz="1600" b="0" i="0">
+              <a:rPr sz="1400" b="0" i="0">
                 <a:solidFill>
                   <a:srgbClr val="11202B"/>
                 </a:solidFill>
@@ -23783,7 +24101,7 @@
               <a:t>로 전사하므로, 세포질로 나가 번역되기 전에 intron을 정확히 잘라내고 exon을 이어 붙여야 한다. 이 과정이 </a:t>
             </a:r>
             <a:r>
-              <a:rPr sz="1600" b="1" i="0">
+              <a:rPr sz="1400" b="1" i="0">
                 <a:solidFill>
                   <a:srgbClr val="11202B"/>
                 </a:solidFill>
@@ -23794,7 +24112,7 @@
               <a:t>splicing</a:t>
             </a:r>
             <a:r>
-              <a:rPr sz="1600" b="0" i="0">
+              <a:rPr sz="1400" b="0" i="0">
                 <a:solidFill>
                   <a:srgbClr val="11202B"/>
                 </a:solidFill>
@@ -23812,7 +24130,7 @@
               </a:spcAft>
             </a:pPr>
             <a:r>
-              <a:rPr sz="1600" b="1" i="0">
+              <a:rPr sz="1400" b="1" i="0">
                 <a:solidFill>
                   <a:srgbClr val="F2B705"/>
                 </a:solidFill>
@@ -23823,7 +24141,7 @@
               <a:t>•  </a:t>
             </a:r>
             <a:r>
-              <a:rPr sz="1600" b="0" i="0">
+              <a:rPr sz="1400" b="0" i="0">
                 <a:solidFill>
                   <a:srgbClr val="11202B"/>
                 </a:solidFill>
@@ -23834,7 +24152,7 @@
               <a:t>pre-mRNA 가공은 세 가지 사건으로 이루어지고, 세 사건은 모두 전사가 진행되는 동안 RNA polymerase II의 C-terminal domain에 모인 인자들에 의해 </a:t>
             </a:r>
             <a:r>
-              <a:rPr sz="1600" b="1" i="0">
+              <a:rPr sz="1400" b="1" i="0">
                 <a:solidFill>
                   <a:srgbClr val="11202B"/>
                 </a:solidFill>
@@ -23845,7 +24163,7 @@
               <a:t>공전사적(co-transcriptional)</a:t>
             </a:r>
             <a:r>
-              <a:rPr sz="1600" b="0" i="0">
+              <a:rPr sz="1400" b="0" i="0">
                 <a:solidFill>
                   <a:srgbClr val="11202B"/>
                 </a:solidFill>
@@ -23863,7 +24181,7 @@
               </a:spcAft>
             </a:pPr>
             <a:r>
-              <a:rPr sz="1600" b="1" i="0">
+              <a:rPr sz="1400" b="1" i="0">
                 <a:solidFill>
                   <a:srgbClr val="F2B705"/>
                 </a:solidFill>
@@ -23874,7 +24192,7 @@
               <a:t>•  </a:t>
             </a:r>
             <a:r>
-              <a:rPr sz="1600" b="1" i="0">
+              <a:rPr sz="1400" b="1" i="0">
                 <a:solidFill>
                   <a:srgbClr val="11202B"/>
                 </a:solidFill>
@@ -23885,7 +24203,7 @@
               <a:t>5' capping</a:t>
             </a:r>
             <a:r>
-              <a:rPr sz="1600" b="0" i="0">
+              <a:rPr sz="1400" b="0" i="0">
                 <a:solidFill>
                   <a:srgbClr val="11202B"/>
                 </a:solidFill>
@@ -23903,7 +24221,7 @@
               </a:spcAft>
             </a:pPr>
             <a:r>
-              <a:rPr sz="1600" b="1" i="0">
+              <a:rPr sz="1400" b="1" i="0">
                 <a:solidFill>
                   <a:srgbClr val="F2B705"/>
                 </a:solidFill>
@@ -23914,7 +24232,7 @@
               <a:t>•  </a:t>
             </a:r>
             <a:r>
-              <a:rPr sz="1600" b="1" i="0">
+              <a:rPr sz="1400" b="1" i="0">
                 <a:solidFill>
                   <a:srgbClr val="11202B"/>
                 </a:solidFill>
@@ -23925,7 +24243,7 @@
               <a:t>3' 말단 가공과 poly(A) 부가</a:t>
             </a:r>
             <a:r>
-              <a:rPr sz="1600" b="0" i="0">
+              <a:rPr sz="1400" b="0" i="0">
                 <a:solidFill>
                   <a:srgbClr val="11202B"/>
                 </a:solidFill>
@@ -23943,7 +24261,7 @@
               </a:spcAft>
             </a:pPr>
             <a:r>
-              <a:rPr sz="1600" b="1" i="0">
+              <a:rPr sz="1400" b="1" i="0">
                 <a:solidFill>
                   <a:srgbClr val="F2B705"/>
                 </a:solidFill>
@@ -23954,7 +24272,7 @@
               <a:t>•  </a:t>
             </a:r>
             <a:r>
-              <a:rPr sz="1600" b="1" i="0">
+              <a:rPr sz="1400" b="1" i="0">
                 <a:solidFill>
                   <a:srgbClr val="11202B"/>
                 </a:solidFill>
@@ -23965,7 +24283,7 @@
               <a:t>Splicing</a:t>
             </a:r>
             <a:r>
-              <a:rPr sz="1600" b="0" i="0">
+              <a:rPr sz="1400" b="0" i="0">
                 <a:solidFill>
                   <a:srgbClr val="11202B"/>
                 </a:solidFill>
@@ -23976,273 +24294,6 @@
               <a:t>: intron 제거와 exon 연결.</a:t>
             </a:r>
           </a:p>
-        </p:txBody>
-      </p:sp>
-    </p:spTree>
-  </p:cSld>
-  <p:clrMapOvr>
-    <a:masterClrMapping/>
-  </p:clrMapOvr>
-</p:sld>
-</file>
-
-<file path=ppt/slides/slide50.xml><?xml version="1.0" encoding="utf-8"?>
-<p:sld xmlns:a="http://schemas.openxmlformats.org/drawingml/2006/main" xmlns:p="http://schemas.openxmlformats.org/presentationml/2006/main" xmlns:r="http://schemas.openxmlformats.org/officeDocument/2006/relationships">
-  <p:cSld>
-    <p:spTree>
-      <p:nvGrpSpPr>
-        <p:cNvPr id="1" name=""/>
-        <p:cNvGrpSpPr/>
-        <p:nvPr/>
-      </p:nvGrpSpPr>
-      <p:grpSpPr/>
-      <p:sp>
-        <p:nvSpPr>
-          <p:cNvPr id="2" name="Rectangle 1"/>
-          <p:cNvSpPr/>
-          <p:nvPr/>
-        </p:nvSpPr>
-        <p:spPr>
-          <a:xfrm>
-            <a:off x="0" y="0"/>
-            <a:ext cx="12191695" cy="6858000"/>
-          </a:xfrm>
-          <a:prstGeom prst="rect">
-            <a:avLst/>
-          </a:prstGeom>
-          <a:solidFill>
-            <a:srgbClr val="F5F8F9"/>
-          </a:solidFill>
-          <a:ln>
-            <a:noFill/>
-          </a:ln>
-          <a:effectLst/>
-        </p:spPr>
-        <p:style>
-          <a:lnRef idx="1">
-            <a:schemeClr val="accent1"/>
-          </a:lnRef>
-          <a:fillRef idx="3">
-            <a:schemeClr val="accent1"/>
-          </a:fillRef>
-          <a:effectRef idx="2">
-            <a:schemeClr val="accent1"/>
-          </a:effectRef>
-          <a:fontRef idx="minor">
-            <a:schemeClr val="lt1"/>
-          </a:fontRef>
-        </p:style>
-        <p:txBody>
-          <a:bodyPr rtlCol="0" anchor="ctr"/>
-          <a:lstStyle/>
-          <a:p>
-            <a:pPr algn="ctr"/>
-          </a:p>
-        </p:txBody>
-      </p:sp>
-      <p:sp>
-        <p:nvSpPr>
-          <p:cNvPr id="3" name="Rectangle 2"/>
-          <p:cNvSpPr/>
-          <p:nvPr/>
-        </p:nvSpPr>
-        <p:spPr>
-          <a:xfrm>
-            <a:off x="0" y="0"/>
-            <a:ext cx="12191695" cy="960120"/>
-          </a:xfrm>
-          <a:prstGeom prst="rect">
-            <a:avLst/>
-          </a:prstGeom>
-          <a:solidFill>
-            <a:srgbClr val="003C71"/>
-          </a:solidFill>
-          <a:ln>
-            <a:noFill/>
-          </a:ln>
-          <a:effectLst/>
-        </p:spPr>
-        <p:style>
-          <a:lnRef idx="1">
-            <a:schemeClr val="accent1"/>
-          </a:lnRef>
-          <a:fillRef idx="3">
-            <a:schemeClr val="accent1"/>
-          </a:fillRef>
-          <a:effectRef idx="2">
-            <a:schemeClr val="accent1"/>
-          </a:effectRef>
-          <a:fontRef idx="minor">
-            <a:schemeClr val="lt1"/>
-          </a:fontRef>
-        </p:style>
-        <p:txBody>
-          <a:bodyPr rtlCol="0" anchor="ctr"/>
-          <a:lstStyle/>
-          <a:p>
-            <a:pPr algn="ctr"/>
-          </a:p>
-        </p:txBody>
-      </p:sp>
-      <p:sp>
-        <p:nvSpPr>
-          <p:cNvPr id="4" name="Rectangle 3"/>
-          <p:cNvSpPr/>
-          <p:nvPr/>
-        </p:nvSpPr>
-        <p:spPr>
-          <a:xfrm>
-            <a:off x="0" y="960120"/>
-            <a:ext cx="12191695" cy="54864"/>
-          </a:xfrm>
-          <a:prstGeom prst="rect">
-            <a:avLst/>
-          </a:prstGeom>
-          <a:solidFill>
-            <a:srgbClr val="F2B705"/>
-          </a:solidFill>
-          <a:ln>
-            <a:noFill/>
-          </a:ln>
-          <a:effectLst/>
-        </p:spPr>
-        <p:style>
-          <a:lnRef idx="1">
-            <a:schemeClr val="accent1"/>
-          </a:lnRef>
-          <a:fillRef idx="3">
-            <a:schemeClr val="accent1"/>
-          </a:fillRef>
-          <a:effectRef idx="2">
-            <a:schemeClr val="accent1"/>
-          </a:effectRef>
-          <a:fontRef idx="minor">
-            <a:schemeClr val="lt1"/>
-          </a:fontRef>
-        </p:style>
-        <p:txBody>
-          <a:bodyPr rtlCol="0" anchor="ctr"/>
-          <a:lstStyle/>
-          <a:p>
-            <a:pPr algn="ctr"/>
-          </a:p>
-        </p:txBody>
-      </p:sp>
-      <p:sp>
-        <p:nvSpPr>
-          <p:cNvPr id="5" name="TextBox 4"/>
-          <p:cNvSpPr txBox="1"/>
-          <p:nvPr/>
-        </p:nvSpPr>
-        <p:spPr>
-          <a:xfrm>
-            <a:off x="457200" y="109728"/>
-            <a:ext cx="11247120" cy="777240"/>
-          </a:xfrm>
-          <a:prstGeom prst="rect">
-            <a:avLst/>
-          </a:prstGeom>
-          <a:noFill/>
-        </p:spPr>
-        <p:txBody>
-          <a:bodyPr wrap="square" anchor="ctr">
-            <a:spAutoFit/>
-          </a:bodyPr>
-          <a:lstStyle/>
-          <a:p>
-            <a:r>
-              <a:rPr sz="1300" b="1" i="0">
-                <a:solidFill>
-                  <a:srgbClr val="F2B705"/>
-                </a:solidFill>
-                <a:latin typeface="Malgun Gothic"/>
-                <a:ea typeface="Malgun Gothic"/>
-                <a:cs typeface="Malgun Gothic"/>
-              </a:rPr>
-              <a:t>REFERENCES   </a:t>
-            </a:r>
-            <a:r>
-              <a:rPr sz="2400" b="1" i="0">
-                <a:solidFill>
-                  <a:srgbClr val="FFFFFF"/>
-                </a:solidFill>
-                <a:latin typeface="Malgun Gothic"/>
-                <a:ea typeface="Malgun Gothic"/>
-                <a:cs typeface="Malgun Gothic"/>
-              </a:rPr>
-              <a:t>참고문헌 (2/2)</a:t>
-            </a:r>
-          </a:p>
-        </p:txBody>
-      </p:sp>
-      <p:sp>
-        <p:nvSpPr>
-          <p:cNvPr id="6" name="TextBox 5"/>
-          <p:cNvSpPr txBox="1"/>
-          <p:nvPr/>
-        </p:nvSpPr>
-        <p:spPr>
-          <a:xfrm>
-            <a:off x="457200" y="6446520"/>
-            <a:ext cx="11247120" cy="301752"/>
-          </a:xfrm>
-          <a:prstGeom prst="rect">
-            <a:avLst/>
-          </a:prstGeom>
-          <a:noFill/>
-        </p:spPr>
-        <p:txBody>
-          <a:bodyPr wrap="square" anchor="ctr">
-            <a:spAutoFit/>
-          </a:bodyPr>
-          <a:lstStyle/>
-          <a:p>
-            <a:r>
-              <a:rPr sz="900" b="0" i="0">
-                <a:solidFill>
-                  <a:srgbClr val="66788A"/>
-                </a:solidFill>
-                <a:latin typeface="Malgun Gothic"/>
-                <a:ea typeface="Malgun Gothic"/>
-                <a:cs typeface="Malgun Gothic"/>
-              </a:rPr>
-              <a:t>M03-W03-L01  ·  Splicing 이상과 질환, RNA 안정성 조절</a:t>
-            </a:r>
-            <a:r>
-              <a:rPr sz="900" b="1" i="0">
-                <a:solidFill>
-                  <a:srgbClr val="003C71"/>
-                </a:solidFill>
-                <a:latin typeface="Malgun Gothic"/>
-                <a:ea typeface="Malgun Gothic"/>
-                <a:cs typeface="Malgun Gothic"/>
-              </a:rPr>
-              <a:t>      50</a:t>
-            </a:r>
-          </a:p>
-        </p:txBody>
-      </p:sp>
-      <p:sp>
-        <p:nvSpPr>
-          <p:cNvPr id="7" name="TextBox 6"/>
-          <p:cNvSpPr txBox="1"/>
-          <p:nvPr/>
-        </p:nvSpPr>
-        <p:spPr>
-          <a:xfrm>
-            <a:off x="640080" y="1280160"/>
-            <a:ext cx="10881360" cy="5029200"/>
-          </a:xfrm>
-          <a:prstGeom prst="rect">
-            <a:avLst/>
-          </a:prstGeom>
-          <a:noFill/>
-        </p:spPr>
-        <p:txBody>
-          <a:bodyPr wrap="square" anchor="t">
-            <a:spAutoFit/>
-          </a:bodyPr>
-          <a:lstStyle/>
           <a:p>
             <a:pPr>
               <a:spcAft>
@@ -24250,7 +24301,7 @@
               </a:spcAft>
             </a:pPr>
             <a:r>
-              <a:rPr sz="2000" b="1" i="0">
+              <a:rPr sz="1400" b="1" i="0">
                 <a:solidFill>
                   <a:srgbClr val="F2B705"/>
                 </a:solidFill>
@@ -24261,44 +24312,26 @@
               <a:t>•  </a:t>
             </a:r>
             <a:r>
-              <a:rPr sz="2000" b="0" i="0">
-                <a:solidFill>
-                  <a:srgbClr val="11202B"/>
-                </a:solidFill>
-                <a:latin typeface="Malgun Gothic"/>
-                <a:ea typeface="Malgun Gothic"/>
-                <a:cs typeface="Malgun Gothic"/>
-              </a:rPr>
-              <a:t>Kurosaki T, Popp MW, Maquat LE. Quality and quantity control of gene expression by nonsense-mediated mRNA decay. Nat Rev Mol Cell Biol 2019;20:406–420.</a:t>
-            </a:r>
-          </a:p>
-          <a:p>
-            <a:pPr>
-              <a:spcAft>
-                <a:spcPts val="900"/>
-              </a:spcAft>
-            </a:pPr>
-            <a:r>
-              <a:rPr sz="2000" b="1" i="0">
-                <a:solidFill>
-                  <a:srgbClr val="F2B705"/>
-                </a:solidFill>
-                <a:latin typeface="Malgun Gothic"/>
-                <a:ea typeface="Malgun Gothic"/>
-                <a:cs typeface="Malgun Gothic"/>
-              </a:rPr>
-              <a:t>•  </a:t>
-            </a:r>
-            <a:r>
-              <a:rPr sz="2000" b="0" i="0">
-                <a:solidFill>
-                  <a:srgbClr val="11202B"/>
-                </a:solidFill>
-                <a:latin typeface="Malgun Gothic"/>
-                <a:ea typeface="Malgun Gothic"/>
-                <a:cs typeface="Malgun Gothic"/>
-              </a:rPr>
-              <a:t>Bartel DP. Metazoan microRNAs. Cell 2018;173:20–51.</a:t>
+              <a:rPr sz="1400" b="0" i="0">
+                <a:solidFill>
+                  <a:srgbClr val="11202B"/>
+                </a:solidFill>
+                <a:latin typeface="Malgun Gothic"/>
+                <a:ea typeface="Malgun Gothic"/>
+                <a:cs typeface="Malgun Gothic"/>
+              </a:rPr>
+              <a:t>사람 유전자의 intron은 수와 크기가 모두 크다. 평균적으로 유전자 하나에 intron이 8~9개 있고, exon의 평균 길이는 약 150 뉴클레오타이드인 데 비해 intron은 수백에서 수십만 뉴클레오타이드에 이른다. DMD 유전자는 79개 exon이 2.2 Mb에 걸쳐 흩어져 있고, 완성된 mRNA는 약 14 kb다. </a:t>
+            </a:r>
+            <a:r>
+              <a:rPr sz="1400" b="1" i="0">
+                <a:solidFill>
+                  <a:srgbClr val="11202B"/>
+                </a:solidFill>
+                <a:latin typeface="Malgun Gothic"/>
+                <a:ea typeface="Malgun Gothic"/>
+                <a:cs typeface="Malgun Gothic"/>
+              </a:rPr>
+              <a:t>전사체의 대부분이 버려지는 서열이므로, 잘라내는 지점이 한 뉴클레오타이드만 틀려도 reading frame 전체가 어긋난다.</a:t>
             </a:r>
           </a:p>
         </p:txBody>
@@ -24575,7 +24608,7 @@
               </a:spcAft>
             </a:pPr>
             <a:r>
-              <a:rPr sz="1600" b="1" i="0">
+              <a:rPr sz="2000" b="1" i="0">
                 <a:solidFill>
                   <a:srgbClr val="F2B705"/>
                 </a:solidFill>
@@ -24586,47 +24619,7 @@
               <a:t>•  </a:t>
             </a:r>
             <a:r>
-              <a:rPr sz="1600" b="0" i="0">
-                <a:solidFill>
-                  <a:srgbClr val="11202B"/>
-                </a:solidFill>
-                <a:latin typeface="Malgun Gothic"/>
-                <a:ea typeface="Malgun Gothic"/>
-                <a:cs typeface="Malgun Gothic"/>
-              </a:rPr>
-              <a:t>사람 유전자의 intron은 수와 크기가 모두 크다. 평균적으로 유전자 하나에 intron이 8~9개 있고, exon의 평균 길이는 약 150 뉴클레오타이드인 데 비해 intron은 수백에서 수십만 뉴클레오타이드에 이른다. DMD 유전자는 79개 exon이 2.2 Mb에 걸쳐 흩어져 있고, 완성된 mRNA는 약 14 kb다. </a:t>
-            </a:r>
-            <a:r>
-              <a:rPr sz="1600" b="1" i="0">
-                <a:solidFill>
-                  <a:srgbClr val="11202B"/>
-                </a:solidFill>
-                <a:latin typeface="Malgun Gothic"/>
-                <a:ea typeface="Malgun Gothic"/>
-                <a:cs typeface="Malgun Gothic"/>
-              </a:rPr>
-              <a:t>전사체의 대부분이 버려지는 서열이므로, 잘라내는 지점이 한 뉴클레오타이드만 틀려도 reading frame 전체가 어긋난다.</a:t>
-            </a:r>
-          </a:p>
-          <a:p>
-            <a:pPr>
-              <a:spcAft>
-                <a:spcPts val="900"/>
-              </a:spcAft>
-            </a:pPr>
-            <a:r>
-              <a:rPr sz="1600" b="1" i="0">
-                <a:solidFill>
-                  <a:srgbClr val="F2B705"/>
-                </a:solidFill>
-                <a:latin typeface="Malgun Gothic"/>
-                <a:ea typeface="Malgun Gothic"/>
-                <a:cs typeface="Malgun Gothic"/>
-              </a:rPr>
-              <a:t>•  </a:t>
-            </a:r>
-            <a:r>
-              <a:rPr sz="1600" b="0" i="0">
+              <a:rPr sz="2000" b="0" i="0">
                 <a:solidFill>
                   <a:srgbClr val="11202B"/>
                 </a:solidFill>
@@ -24637,7 +24630,7 @@
               <a:t>Splicing이 필요한 이유는 두 가지로 묶인다. 첫째, intron을 제거하지 않으면 번역이 불가능하다. 둘째, </a:t>
             </a:r>
             <a:r>
-              <a:rPr sz="1600" b="1" i="0">
+              <a:rPr sz="2000" b="1" i="0">
                 <a:solidFill>
                   <a:srgbClr val="11202B"/>
                 </a:solidFill>
@@ -24648,7 +24641,7 @@
               <a:t>같은 pre-mRNA에서 exon의 조합을 달리하면 여러 단백질을 만들 수 있다.</a:t>
             </a:r>
             <a:r>
-              <a:rPr sz="1600" b="0" i="0">
+              <a:rPr sz="2000" b="0" i="0">
                 <a:solidFill>
                   <a:srgbClr val="11202B"/>
                 </a:solidFill>
